--- a/public/fun/pack/pptx/familypro/가족소개프리미엄_14_나혼자·1인가구_네이비샴페인.pptx
+++ b/public/fun/pack/pptx/familypro/가족소개프리미엄_14_나혼자·1인가구_네이비샴페인.pptx
@@ -113,12 +113,12 @@
   <p:extLst>
     <p:ext uri="{521415D9-36F7-43E2-AB2F-B90AF26B5E84}">
       <p14:sectionLst xmlns:p14="http://schemas.microsoft.com/office/powerpoint/2010/main">
-        <p14:section name="시작" id="{1B7BEE14-EE54-492F-A1E5-7184D4D3BCBA}">
+        <p14:section name="시작" id="{D7D600C0-C3F0-4249-9EEE-DE1389163D68}">
           <p14:sldIdLst>
             <p14:sldId id="256"/>
           </p14:sldIdLst>
         </p14:section>
-        <p14:section name="본문" id="{098AED96-71D7-4887-9BD7-C8A42EE184FD}">
+        <p14:section name="본문" id="{53336532-36C2-4444-A110-D4D66A320A71}">
           <p14:sldIdLst>
             <p14:sldId id="257"/>
             <p14:sldId id="258"/>
@@ -127,7 +127,7 @@
             <p14:sldId id="261"/>
           </p14:sldIdLst>
         </p14:section>
-        <p14:section name="마무리" id="{8D4CD761-6A8F-48DD-A790-4DD93827A580}">
+        <p14:section name="마무리" id="{4FBD7C98-835E-4AC0-9E61-0CF9B17ECCA0}">
           <p14:sldIdLst>
             <p14:sldId id="262"/>
           </p14:sldIdLst>
@@ -1507,7 +1507,7 @@
             </a:lvl1pPr>
           </a:lstStyle>
           <a:p>
-            <a:fld id="{8DF90811-75F4-4E20-A9D5-47903F9844B8}" type="slidenum">
+            <a:fld id="{3B8ACFA2-8D77-4583-B42C-E991EB61EFBE}" type="slidenum">
               <a:rPr lang="en-US"/>
               <a:t>‹#›</a:t>
             </a:fld>
@@ -2482,7 +2482,7 @@
             </a:lvl1pPr>
           </a:lstStyle>
           <a:p>
-            <a:fld id="{98EF6B52-E815-4680-8F39-49D6FD496CF4}" type="slidenum">
+            <a:fld id="{AE3F1D7A-A10F-4110-A656-A0A75C2CD8E1}" type="slidenum">
               <a:rPr lang="en-US"/>
               <a:t>‹#›</a:t>
             </a:fld>
@@ -3489,7 +3489,7 @@
             </a:lvl1pPr>
           </a:lstStyle>
           <a:p>
-            <a:fld id="{9B4F63CF-A699-43D5-87CE-59B5391936AA}" type="slidenum">
+            <a:fld id="{E61A77FB-74DD-4B9E-ACD9-EB564CE19CC1}" type="slidenum">
               <a:rPr lang="en-US"/>
               <a:t>‹#›</a:t>
             </a:fld>
@@ -4630,7 +4630,7 @@
           <a:p>
             <a:r>
               <a:rPr lang="ko-KR"/>
-              <a:t>퇴근길 장마에 우산 하나 사 들고</a:t>
+              <a:t>퇴근길에 노란 우산 하나 사 들고</a:t>
             </a:r>
           </a:p>
         </p:txBody>
@@ -4652,7 +4652,7 @@
           <a:p>
             <a:r>
               <a:rPr lang="ko-KR"/>
-              <a:t>나 혼자 · 1인 가구 · 0000. 00. 00</a:t>
+              <a:t>나 혼자 · 1인 가구 · 날짜 입력</a:t>
             </a:r>
           </a:p>
         </p:txBody>
@@ -4941,7 +4941,7 @@
           <a:bodyPr/>
           <a:lstStyle/>
           <a:p>
-            <a:fld id="{6A236B82-E74C-4522-955F-985E8F47DC61}" type="slidenum">
+            <a:fld id="{D64CA3C6-C820-4BC9-AC41-235C3B4ABA9A}" type="slidenum">
               <a:rPr lang="en-US"/>
               <a:t>‹#›</a:t>
             </a:fld>
@@ -5491,7 +5491,7 @@
           <a:bodyPr/>
           <a:lstStyle/>
           <a:p>
-            <a:fld id="{AA365711-3EEA-47BE-B512-12F74334C113}" type="slidenum">
+            <a:fld id="{45857D22-0CF1-4810-BABA-9E60D1094379}" type="slidenum">
               <a:rPr lang="en-US"/>
               <a:t>‹#›</a:t>
             </a:fld>
@@ -6466,7 +6466,7 @@
           <a:bodyPr/>
           <a:lstStyle/>
           <a:p>
-            <a:fld id="{404B8DB0-663E-45CF-937D-59D43E7CC8B2}" type="slidenum">
+            <a:fld id="{CB31EE69-D2B1-4B7E-882A-386B30AF1A6C}" type="slidenum">
               <a:rPr lang="en-US"/>
               <a:t>‹#›</a:t>
             </a:fld>
@@ -7724,7 +7724,7 @@
           <a:bodyPr/>
           <a:lstStyle/>
           <a:p>
-            <a:fld id="{CE0B15E4-08F7-46F3-9791-8D33FDD40CB3}" type="slidenum">
+            <a:fld id="{BE5F5697-F0B3-472E-A743-567DAFA7A4C3}" type="slidenum">
               <a:rPr lang="en-US"/>
               <a:t>‹#›</a:t>
             </a:fld>
@@ -7812,7 +7812,7 @@
           <a:bodyPr/>
           <a:lstStyle/>
           <a:p>
-            <a:fld id="{46FAD181-2CA4-4183-8347-D601FCAD1E26}" type="slidenum">
+            <a:fld id="{CBA750CA-92E8-4DD0-8560-4163840E0800}" type="slidenum">
               <a:rPr lang="en-US"/>
               <a:t>‹#›</a:t>
             </a:fld>
